--- a/logo/architecture.pptx
+++ b/logo/architecture.pptx
@@ -9,7 +9,7 @@
   </p:notesMasterIdLst>
   <p:sldIdLst>
     <p:sldId id="257" r:id="rId2"/>
-    <p:sldId id="266" r:id="rId3"/>
+    <p:sldId id="267" r:id="rId3"/>
   </p:sldIdLst>
   <p:sldSz cx="12192000" cy="6858000"/>
   <p:notesSz cx="6858000" cy="9144000"/>
@@ -108,6 +108,11 @@
       </a:defRPr>
     </a:lvl9pPr>
   </p:defaultTextStyle>
+  <p:extLst>
+    <p:ext uri="{EFAFB233-063F-42B5-8137-9DF3F51BA10A}">
+      <p15:sldGuideLst xmlns:p15="http://schemas.microsoft.com/office/powerpoint/2012/main"/>
+    </p:ext>
+  </p:extLst>
 </p:presentation>
 </file>
 
@@ -6520,7 +6525,7 @@
               </a:solidFill>
               <a:ln w="19050">
                 <a:solidFill>
-                  <a:srgbClr val="334155"/>
+                  <a:srgbClr val="4B5F7D"/>
                 </a:solidFill>
                 <a:round/>
               </a:ln>
@@ -6656,7 +6661,7 @@
               </a:solidFill>
               <a:ln w="19050">
                 <a:solidFill>
-                  <a:srgbClr val="334155"/>
+                  <a:srgbClr val="4B5F7D"/>
                 </a:solidFill>
               </a:ln>
             </p:spPr>
@@ -6999,7 +7004,7 @@
     </p:spTree>
     <p:extLst>
       <p:ext uri="{BB962C8B-B14F-4D97-AF65-F5344CB8AC3E}">
-        <p14:creationId xmlns:p14="http://schemas.microsoft.com/office/powerpoint/2010/main" val="3816990041"/>
+        <p14:creationId xmlns:p14="http://schemas.microsoft.com/office/powerpoint/2010/main" val="162673274"/>
       </p:ext>
     </p:extLst>
   </p:cSld>
